--- a/templates/t4_quiz_donyu.pptx
+++ b/templates/t4_quiz_donyu.pptx
@@ -4047,7 +4047,7 @@
                 </a:solidFill>
                 <a:latin typeface="BIZ UDPゴシック"/>
               </a:rPr>
-              <a:t>クイズで はじめます。</a:t>
+              <a:t>クイズで はじめます</a:t>
             </a:r>
           </a:p>
         </p:txBody>
@@ -5473,7 +5473,7 @@
                 </a:solidFill>
                 <a:latin typeface="BIZ UDPゴシック"/>
               </a:rPr>
-              <a:t>つづきは、この単元で。</a:t>
+              <a:t>つづきは この単元で</a:t>
             </a:r>
           </a:p>
         </p:txBody>
